--- a/public/fun/pack/pptx/reviewpro/보장점검양식프리미엄_33_가족점검_와인로즈.pptx
+++ b/public/fun/pack/pptx/reviewpro/보장점검양식프리미엄_33_가족점검_와인로즈.pptx
@@ -112,12 +112,12 @@
   <p:extLst>
     <p:ext uri="{521415D9-36F7-43E2-AB2F-B90AF26B5E84}">
       <p14:sectionLst xmlns:p14="http://schemas.microsoft.com/office/powerpoint/2010/main">
-        <p14:section name="시작" id="{D736A302-AD28-4622-87A5-B29BAFE44469}">
+        <p14:section name="시작" id="{2CC2EF53-FBD7-42CC-8622-0CC3EB0062DD}">
           <p14:sldIdLst>
             <p14:sldId id="256"/>
           </p14:sldIdLst>
         </p14:section>
-        <p14:section name="본문" id="{AF49781D-32E0-488D-A172-F0A4A123B958}">
+        <p14:section name="본문" id="{7F0DBD93-8E45-4E3E-9D7B-F1534061F840}">
           <p14:sldIdLst>
             <p14:sldId id="257"/>
             <p14:sldId id="258"/>
@@ -1593,7 +1593,7 @@
             </a:lvl1pPr>
           </a:lstStyle>
           <a:p>
-            <a:fld id="{56EC45B7-431B-4D55-AA6A-766F8EB5FDB4}" type="slidenum">
+            <a:fld id="{C9E34C93-59FB-4279-AA98-2CA543E3B75D}" type="slidenum">
               <a:rPr lang="en-US"/>
               <a:t>‹#›</a:t>
             </a:fld>
@@ -2297,7 +2297,7 @@
             </a:lvl1pPr>
           </a:lstStyle>
           <a:p>
-            <a:fld id="{18EA0FD1-6D62-4A37-A974-53143C6369D1}" type="slidenum">
+            <a:fld id="{B57CBF01-78A2-4D74-AAE0-A6A701893CF6}" type="slidenum">
               <a:rPr lang="en-US"/>
               <a:t>‹#›</a:t>
             </a:fld>
@@ -2975,7 +2975,7 @@
             </a:lvl1pPr>
           </a:lstStyle>
           <a:p>
-            <a:fld id="{1C6E0369-F042-4F81-BBCC-D28B1216D0AF}" type="slidenum">
+            <a:fld id="{3E6E01A9-0A3D-43DF-9CA3-06F2649D942A}" type="slidenum">
               <a:rPr lang="en-US"/>
               <a:t>‹#›</a:t>
             </a:fld>
@@ -3838,7 +3838,7 @@
           <a:p>
             <a:r>
               <a:rPr lang="ko-KR"/>
-              <a:t>가족 점검 · 0000. 00. 00</a:t>
+              <a:t>가족 점검 · 날짜 입력</a:t>
             </a:r>
           </a:p>
           <a:p>
@@ -3929,7 +3929,7 @@
           <a:bodyPr/>
           <a:lstStyle/>
           <a:p>
-            <a:fld id="{D2E1D740-8230-4AE7-BB81-F2DA65775B48}" type="slidenum">
+            <a:fld id="{977A4922-A890-471D-995B-F23B972D9678}" type="slidenum">
               <a:rPr lang="en-US"/>
               <a:t>‹#›</a:t>
             </a:fld>
@@ -4839,7 +4839,7 @@
           <a:bodyPr/>
           <a:lstStyle/>
           <a:p>
-            <a:fld id="{6FCBD5D0-6374-4F55-B7D3-FDE16849BAA3}" type="slidenum">
+            <a:fld id="{FAD404B0-D58C-454D-B307-4735C0F2D4F4}" type="slidenum">
               <a:rPr lang="en-US"/>
               <a:t>‹#›</a:t>
             </a:fld>
@@ -6345,7 +6345,7 @@
           <a:bodyPr/>
           <a:lstStyle/>
           <a:p>
-            <a:fld id="{BA4F241C-FEAE-49C7-BB6B-14FD9D1AB157}" type="slidenum">
+            <a:fld id="{A04E5C97-A8F6-43AC-8827-C3694561D10D}" type="slidenum">
               <a:rPr lang="en-US"/>
               <a:t>‹#›</a:t>
             </a:fld>
@@ -7895,7 +7895,7 @@
           <a:bodyPr/>
           <a:lstStyle/>
           <a:p>
-            <a:fld id="{63F691A2-D1FF-4BD0-9741-28F0AB3EE493}" type="slidenum">
+            <a:fld id="{E4F1F935-FCDA-4ED6-B647-9039A0B9C660}" type="slidenum">
               <a:rPr lang="en-US"/>
               <a:t>‹#›</a:t>
             </a:fld>
@@ -8772,7 +8772,7 @@
           <a:bodyPr/>
           <a:lstStyle/>
           <a:p>
-            <a:fld id="{1AF5C898-4CCB-44BF-990E-E4F4DC5B8D8E}" type="slidenum">
+            <a:fld id="{C766B471-9945-4855-A822-2CB3052D39D7}" type="slidenum">
               <a:rPr lang="en-US"/>
               <a:t>‹#›</a:t>
             </a:fld>
